--- a/dist/초6/영어/의사소통/초6_영어_의사소통_02_제안하고답하기_학생용.pptx
+++ b/dist/초6/영어/의사소통/초6_영어_의사소통_02_제안하고답하기_학생용.pptx
@@ -120,13 +120,13 @@
   <p:extLst>
     <p:ext uri="{521415D9-36F7-43E2-AB2F-B90AF26B5E84}">
       <p14:sectionLst xmlns:p14="http://schemas.microsoft.com/office/powerpoint/2010/main">
-        <p14:section name="도입" id="{4e52072c-e688-17b2-6314-c1aa4c725f03}">
+        <p14:section name="도입" id="{170f448a-6faf-1998-a719-57bcebc72a03}">
           <p14:sldIdLst>
             <p14:sldId id="256"/>
             <p14:sldId id="257"/>
           </p14:sldIdLst>
         </p14:section>
-        <p14:section name="개념" id="{af63382b-860c-4f0c-14ba-081fb70ef0be}">
+        <p14:section name="개념" id="{7103f9d8-6ba8-487d-6da3-fc1965ecaffa}">
           <p14:sldIdLst>
             <p14:sldId id="258"/>
             <p14:sldId id="259"/>
@@ -134,7 +134,7 @@
             <p14:sldId id="261"/>
           </p14:sldIdLst>
         </p14:section>
-        <p14:section name="연습" id="{e82719c2-d3e6-9f4e-daa8-427c2dadba79}">
+        <p14:section name="연습" id="{29e94961-b537-8734-68c3-61bf60389d18}">
           <p14:sldIdLst>
             <p14:sldId id="262"/>
             <p14:sldId id="263"/>
@@ -142,18 +142,18 @@
             <p14:sldId id="265"/>
           </p14:sldIdLst>
         </p14:section>
-        <p14:section name="확인" id="{2ba328da-91dd-1f9b-6631-f1bff0bdcb8c}">
+        <p14:section name="확인" id="{18b6f376-4af1-47c2-d6ac-4d5617f6f33f}">
           <p14:sldIdLst>
             <p14:sldId id="266"/>
             <p14:sldId id="267"/>
           </p14:sldIdLst>
         </p14:section>
-        <p14:section name="정리" id="{d0c5a8d7-8676-04bd-27f0-0ecc0906c927}">
+        <p14:section name="정리" id="{5972e35b-5ce2-bce0-f88e-3d85bfaf2d77}">
           <p14:sldIdLst>
             <p14:sldId id="268"/>
           </p14:sldIdLst>
         </p14:section>
-        <p14:section name="보충" id="{582371d6-8992-57a3-c69c-4d9af0ccdfb5}">
+        <p14:section name="보충" id="{f883223d-4cf4-c40f-ff60-a209fd5afcce}">
           <p14:sldIdLst>
             <p14:sldId id="269"/>
           </p14:sldIdLst>
